--- a/examples/arabic-bilingual-demo.pptx
+++ b/examples/arabic-bilingual-demo.pptx
@@ -4255,7 +4255,7 @@
                 </a:solidFill>
                 <a:latin typeface="Cairo"/>
               </a:rPr>
-              <a:t>Presentation Title</a:t>
+              <a:t>منصة وصل</a:t>
             </a:r>
           </a:p>
         </p:txBody>
@@ -6485,7 +6485,7 @@
                 </a:solidFill>
                 <a:latin typeface="Cairo"/>
               </a:rPr>
-              <a:t>Thank you</a:t>
+              <a:t>نغلق الحلقة معا</a:t>
             </a:r>
           </a:p>
         </p:txBody>
